--- a/Graphics-Time-Machine-interaktivnyj-muzej-kompyuternoj-grafiki.pptx
+++ b/Graphics-Time-Machine-interaktivnyj-muzej-kompyuternoj-grafiki.pptx
@@ -4233,15 +4233,14 @@
         </p:spPr>
         <p:txBody>
           <a:bodyPr wrap="square" lIns="0" tIns="0" rIns="0" bIns="0" rtlCol="0" anchor="t">
-            <a:normAutofit/>
+            <a:normAutofit fontScale="77500" lnSpcReduction="20000"/>
           </a:bodyPr>
           <a:lstStyle/>
           <a:p>
-            <a:pPr marL="0" indent="0" algn="l">
+            <a:pPr>
               <a:lnSpc>
                 <a:spcPct val="133000"/>
               </a:lnSpc>
-              <a:buNone/>
             </a:pPr>
             <a:r>
               <a:rPr lang="en-US" sz="1450" dirty="0">
@@ -4252,7 +4251,7 @@
                 <a:ea typeface="Manrope" pitchFamily="34" charset="-122"/>
                 <a:cs typeface="Manrope" pitchFamily="34" charset="-120"/>
               </a:rPr>
-              <a:t>Ссылка на репозиторий: [вставь ссылку]</a:t>
+              <a:t>Ссылка на репозиторий: https://github.com/1KLEAF1/graphics-time-machine</a:t>
             </a:r>
             <a:endParaRPr lang="en-US" sz="1450" dirty="0"/>
           </a:p>
